--- a/decks/claude-ppt-lab/free-topic-deck/export/pipeline-recap.bespoke.pptx
+++ b/decks/claude-ppt-lab/free-topic-deck/export/pipeline-recap.bespoke.pptx
@@ -2515,48 +2515,39 @@
           </a:ln>
         </p:spPr>
       </p:sp>
-      <p:sp>
-        <p:nvSpPr>
-          <p:cNvPr id="23" name="Text 20"/>
-          <p:cNvSpPr/>
-          <p:nvPr/>
-        </p:nvSpPr>
-        <p:spPr>
-          <a:xfrm>
-            <a:off x="685800" y="4604004"/>
-            <a:ext cx="384048" cy="384048"/>
-          </a:xfrm>
-          <a:prstGeom prst="rect">
-            <a:avLst/>
-          </a:prstGeom>
-          <a:noFill/>
-          <a:ln/>
-        </p:spPr>
-        <p:txBody>
-          <a:bodyPr wrap="square" lIns="0" tIns="0" rIns="0" bIns="0" rtlCol="0" anchor="ctr"/>
-          <a:lstStyle/>
-          <a:p>
-            <a:pPr algn="ctr" indent="0" marL="0">
-              <a:buNone/>
-            </a:pPr>
-            <a:r>
-              <a:rPr lang="en-US" sz="1250" b="1" dirty="0">
-                <a:solidFill>
-                  <a:srgbClr val="2F4B7C"/>
-                </a:solidFill>
-                <a:latin typeface="Pretendard" pitchFamily="34" charset="0"/>
-                <a:ea typeface="Pretendard" pitchFamily="34" charset="-122"/>
-                <a:cs typeface="Pretendard" pitchFamily="34" charset="-120"/>
-              </a:rPr>
-              <a:t>✦</a:t>
-            </a:r>
-            <a:endParaRPr lang="en-US" sz="1250" dirty="0"/>
-          </a:p>
-        </p:txBody>
-      </p:sp>
-      <p:sp>
-        <p:nvSpPr>
-          <p:cNvPr id="24" name="Text 21"/>
+      <p:pic>
+        <p:nvPicPr>
+          <p:cNvPr id="23" name="Image 0" descr="preencoded.png">    </p:cNvPr>
+          <p:cNvPicPr>
+            <a:picLocks noChangeAspect="1"/>
+          </p:cNvPicPr>
+          <p:nvPr/>
+        </p:nvPicPr>
+        <p:blipFill>
+          <a:blip r:embed="rId1">
+            <a:extLst>
+              <a:ext uri="{96DAC541-7B7A-43D3-8B79-37D633B846F1}">
+                <asvg:svgBlip xmlns:asvg="http://schemas.microsoft.com/office/drawing/2016/SVG/main" r:embed="rId2"/>
+              </a:ext>
+            </a:extLst>
+          </a:blip>
+          <a:stretch>
+            <a:fillRect/>
+          </a:stretch>
+        </p:blipFill>
+        <p:spPr>
+          <a:xfrm>
+            <a:off x="777972" y="4696176"/>
+            <a:ext cx="199705" cy="199705"/>
+          </a:xfrm>
+          <a:prstGeom prst="rect">
+            <a:avLst/>
+          </a:prstGeom>
+        </p:spPr>
+      </p:pic>
+      <p:sp>
+        <p:nvSpPr>
+          <p:cNvPr id="24" name="Text 20"/>
           <p:cNvSpPr/>
           <p:nvPr/>
         </p:nvSpPr>
@@ -2595,7 +2586,7 @@
       </p:sp>
       <p:sp>
         <p:nvSpPr>
-          <p:cNvPr id="25" name="Text 22"/>
+          <p:cNvPr id="25" name="Text 21"/>
           <p:cNvSpPr/>
           <p:nvPr/>
         </p:nvSpPr>
@@ -2634,7 +2625,7 @@
       </p:sp>
       <p:sp>
         <p:nvSpPr>
-          <p:cNvPr id="26" name="Text 23"/>
+          <p:cNvPr id="26" name="Text 22"/>
           <p:cNvSpPr/>
           <p:nvPr/>
         </p:nvSpPr>
@@ -2673,7 +2664,7 @@
       </p:sp>
       <p:sp>
         <p:nvSpPr>
-          <p:cNvPr id="27" name="Shape 24"/>
+          <p:cNvPr id="27" name="Shape 23"/>
           <p:cNvSpPr/>
           <p:nvPr/>
         </p:nvSpPr>
@@ -2698,48 +2689,39 @@
           </a:ln>
         </p:spPr>
       </p:sp>
-      <p:sp>
-        <p:nvSpPr>
-          <p:cNvPr id="28" name="Text 25"/>
-          <p:cNvSpPr/>
-          <p:nvPr/>
-        </p:nvSpPr>
-        <p:spPr>
-          <a:xfrm>
-            <a:off x="4460138" y="4604004"/>
-            <a:ext cx="384048" cy="384048"/>
-          </a:xfrm>
-          <a:prstGeom prst="rect">
-            <a:avLst/>
-          </a:prstGeom>
-          <a:noFill/>
-          <a:ln/>
-        </p:spPr>
-        <p:txBody>
-          <a:bodyPr wrap="square" lIns="0" tIns="0" rIns="0" bIns="0" rtlCol="0" anchor="ctr"/>
-          <a:lstStyle/>
-          <a:p>
-            <a:pPr algn="ctr" indent="0" marL="0">
-              <a:buNone/>
-            </a:pPr>
-            <a:r>
-              <a:rPr lang="en-US" sz="1250" b="1" dirty="0">
-                <a:solidFill>
-                  <a:srgbClr val="2F4B7C"/>
-                </a:solidFill>
-                <a:latin typeface="Pretendard" pitchFamily="34" charset="0"/>
-                <a:ea typeface="Pretendard" pitchFamily="34" charset="-122"/>
-                <a:cs typeface="Pretendard" pitchFamily="34" charset="-120"/>
-              </a:rPr>
-              <a:t>⧉</a:t>
-            </a:r>
-            <a:endParaRPr lang="en-US" sz="1250" dirty="0"/>
-          </a:p>
-        </p:txBody>
-      </p:sp>
-      <p:sp>
-        <p:nvSpPr>
-          <p:cNvPr id="29" name="Text 26"/>
+      <p:pic>
+        <p:nvPicPr>
+          <p:cNvPr id="28" name="Image 1" descr="preencoded.png">    </p:cNvPr>
+          <p:cNvPicPr>
+            <a:picLocks noChangeAspect="1"/>
+          </p:cNvPicPr>
+          <p:nvPr/>
+        </p:nvPicPr>
+        <p:blipFill>
+          <a:blip r:embed="rId3">
+            <a:extLst>
+              <a:ext uri="{96DAC541-7B7A-43D3-8B79-37D633B846F1}">
+                <asvg:svgBlip xmlns:asvg="http://schemas.microsoft.com/office/drawing/2016/SVG/main" r:embed="rId4"/>
+              </a:ext>
+            </a:extLst>
+          </a:blip>
+          <a:stretch>
+            <a:fillRect/>
+          </a:stretch>
+        </p:blipFill>
+        <p:spPr>
+          <a:xfrm>
+            <a:off x="4552310" y="4696176"/>
+            <a:ext cx="199705" cy="199705"/>
+          </a:xfrm>
+          <a:prstGeom prst="rect">
+            <a:avLst/>
+          </a:prstGeom>
+        </p:spPr>
+      </p:pic>
+      <p:sp>
+        <p:nvSpPr>
+          <p:cNvPr id="29" name="Text 24"/>
           <p:cNvSpPr/>
           <p:nvPr/>
         </p:nvSpPr>
@@ -2778,7 +2760,7 @@
       </p:sp>
       <p:sp>
         <p:nvSpPr>
-          <p:cNvPr id="30" name="Text 27"/>
+          <p:cNvPr id="30" name="Text 25"/>
           <p:cNvSpPr/>
           <p:nvPr/>
         </p:nvSpPr>
@@ -2817,7 +2799,7 @@
       </p:sp>
       <p:sp>
         <p:nvSpPr>
-          <p:cNvPr id="31" name="Text 28"/>
+          <p:cNvPr id="31" name="Text 26"/>
           <p:cNvSpPr/>
           <p:nvPr/>
         </p:nvSpPr>
@@ -2856,7 +2838,7 @@
       </p:sp>
       <p:sp>
         <p:nvSpPr>
-          <p:cNvPr id="32" name="Shape 29"/>
+          <p:cNvPr id="32" name="Shape 27"/>
           <p:cNvSpPr/>
           <p:nvPr/>
         </p:nvSpPr>
@@ -2881,48 +2863,39 @@
           </a:ln>
         </p:spPr>
       </p:sp>
-      <p:sp>
-        <p:nvSpPr>
-          <p:cNvPr id="33" name="Text 30"/>
-          <p:cNvSpPr/>
-          <p:nvPr/>
-        </p:nvSpPr>
-        <p:spPr>
-          <a:xfrm>
-            <a:off x="8234477" y="4604004"/>
-            <a:ext cx="384048" cy="384048"/>
-          </a:xfrm>
-          <a:prstGeom prst="rect">
-            <a:avLst/>
-          </a:prstGeom>
-          <a:noFill/>
-          <a:ln/>
-        </p:spPr>
-        <p:txBody>
-          <a:bodyPr wrap="square" lIns="0" tIns="0" rIns="0" bIns="0" rtlCol="0" anchor="ctr"/>
-          <a:lstStyle/>
-          <a:p>
-            <a:pPr algn="ctr" indent="0" marL="0">
-              <a:buNone/>
-            </a:pPr>
-            <a:r>
-              <a:rPr lang="en-US" sz="1250" b="1" dirty="0">
-                <a:solidFill>
-                  <a:srgbClr val="2F4B7C"/>
-                </a:solidFill>
-                <a:latin typeface="Pretendard" pitchFamily="34" charset="0"/>
-                <a:ea typeface="Pretendard" pitchFamily="34" charset="-122"/>
-                <a:cs typeface="Pretendard" pitchFamily="34" charset="-120"/>
-              </a:rPr>
-              <a:t>⌗</a:t>
-            </a:r>
-            <a:endParaRPr lang="en-US" sz="1250" dirty="0"/>
-          </a:p>
-        </p:txBody>
-      </p:sp>
-      <p:sp>
-        <p:nvSpPr>
-          <p:cNvPr id="34" name="Text 31"/>
+      <p:pic>
+        <p:nvPicPr>
+          <p:cNvPr id="33" name="Image 2" descr="preencoded.png">    </p:cNvPr>
+          <p:cNvPicPr>
+            <a:picLocks noChangeAspect="1"/>
+          </p:cNvPicPr>
+          <p:nvPr/>
+        </p:nvPicPr>
+        <p:blipFill>
+          <a:blip r:embed="rId5">
+            <a:extLst>
+              <a:ext uri="{96DAC541-7B7A-43D3-8B79-37D633B846F1}">
+                <asvg:svgBlip xmlns:asvg="http://schemas.microsoft.com/office/drawing/2016/SVG/main" r:embed="rId6"/>
+              </a:ext>
+            </a:extLst>
+          </a:blip>
+          <a:stretch>
+            <a:fillRect/>
+          </a:stretch>
+        </p:blipFill>
+        <p:spPr>
+          <a:xfrm>
+            <a:off x="8326648" y="4696176"/>
+            <a:ext cx="199705" cy="199705"/>
+          </a:xfrm>
+          <a:prstGeom prst="rect">
+            <a:avLst/>
+          </a:prstGeom>
+        </p:spPr>
+      </p:pic>
+      <p:sp>
+        <p:nvSpPr>
+          <p:cNvPr id="34" name="Text 28"/>
           <p:cNvSpPr/>
           <p:nvPr/>
         </p:nvSpPr>
@@ -2961,7 +2934,7 @@
       </p:sp>
       <p:sp>
         <p:nvSpPr>
-          <p:cNvPr id="35" name="Text 32"/>
+          <p:cNvPr id="35" name="Text 29"/>
           <p:cNvSpPr/>
           <p:nvPr/>
         </p:nvSpPr>
@@ -3000,7 +2973,7 @@
       </p:sp>
       <p:sp>
         <p:nvSpPr>
-          <p:cNvPr id="36" name="Text 33"/>
+          <p:cNvPr id="36" name="Text 30"/>
           <p:cNvSpPr/>
           <p:nvPr/>
         </p:nvSpPr>
@@ -4225,8 +4198,8 @@
         </p:nvSpPr>
         <p:spPr>
           <a:xfrm>
-            <a:off x="685800" y="2446020"/>
-            <a:ext cx="3271418" cy="0"/>
+            <a:off x="685800" y="2061972"/>
+            <a:ext cx="4998568" cy="0"/>
           </a:xfrm>
           <a:prstGeom prst="line">
             <a:avLst/>
@@ -4248,8 +4221,8 @@
         </p:nvSpPr>
         <p:spPr>
           <a:xfrm>
-            <a:off x="685800" y="2574036"/>
-            <a:ext cx="3271418" cy="512064"/>
+            <a:off x="685800" y="2189988"/>
+            <a:ext cx="4998568" cy="512064"/>
           </a:xfrm>
           <a:prstGeom prst="rect">
             <a:avLst/>
@@ -4287,8 +4260,8 @@
         </p:nvSpPr>
         <p:spPr>
           <a:xfrm>
-            <a:off x="685800" y="3122676"/>
-            <a:ext cx="3271418" cy="256032"/>
+            <a:off x="685800" y="2738628"/>
+            <a:ext cx="4998568" cy="256032"/>
           </a:xfrm>
           <a:prstGeom prst="rect">
             <a:avLst/>
@@ -4326,8 +4299,8 @@
         </p:nvSpPr>
         <p:spPr>
           <a:xfrm>
-            <a:off x="685800" y="3378708"/>
-            <a:ext cx="3271418" cy="457200"/>
+            <a:off x="685800" y="2994660"/>
+            <a:ext cx="4998568" cy="457200"/>
           </a:xfrm>
           <a:prstGeom prst="rect">
             <a:avLst/>
@@ -4365,8 +4338,8 @@
         </p:nvSpPr>
         <p:spPr>
           <a:xfrm>
-            <a:off x="4460138" y="2446020"/>
-            <a:ext cx="3271418" cy="0"/>
+            <a:off x="685800" y="3497580"/>
+            <a:ext cx="4998568" cy="0"/>
           </a:xfrm>
           <a:prstGeom prst="line">
             <a:avLst/>
@@ -4388,8 +4361,8 @@
         </p:nvSpPr>
         <p:spPr>
           <a:xfrm>
-            <a:off x="4460138" y="2574036"/>
-            <a:ext cx="3271418" cy="512064"/>
+            <a:off x="685800" y="3625596"/>
+            <a:ext cx="4998568" cy="512064"/>
           </a:xfrm>
           <a:prstGeom prst="rect">
             <a:avLst/>
@@ -4427,8 +4400,8 @@
         </p:nvSpPr>
         <p:spPr>
           <a:xfrm>
-            <a:off x="4460138" y="3122676"/>
-            <a:ext cx="3271418" cy="256032"/>
+            <a:off x="685800" y="4174236"/>
+            <a:ext cx="4998568" cy="256032"/>
           </a:xfrm>
           <a:prstGeom prst="rect">
             <a:avLst/>
@@ -4466,8 +4439,8 @@
         </p:nvSpPr>
         <p:spPr>
           <a:xfrm>
-            <a:off x="4460138" y="3378708"/>
-            <a:ext cx="3271418" cy="457200"/>
+            <a:off x="685800" y="4430268"/>
+            <a:ext cx="4998568" cy="457200"/>
           </a:xfrm>
           <a:prstGeom prst="rect">
             <a:avLst/>
@@ -4505,8 +4478,8 @@
         </p:nvSpPr>
         <p:spPr>
           <a:xfrm>
-            <a:off x="8234477" y="2446020"/>
-            <a:ext cx="3271418" cy="0"/>
+            <a:off x="685800" y="4933188"/>
+            <a:ext cx="4998568" cy="0"/>
           </a:xfrm>
           <a:prstGeom prst="line">
             <a:avLst/>
@@ -4528,8 +4501,8 @@
         </p:nvSpPr>
         <p:spPr>
           <a:xfrm>
-            <a:off x="8234477" y="2574036"/>
-            <a:ext cx="3271418" cy="512064"/>
+            <a:off x="685800" y="5061204"/>
+            <a:ext cx="4998568" cy="512064"/>
           </a:xfrm>
           <a:prstGeom prst="rect">
             <a:avLst/>
@@ -4567,8 +4540,8 @@
         </p:nvSpPr>
         <p:spPr>
           <a:xfrm>
-            <a:off x="8234477" y="3122676"/>
-            <a:ext cx="3271418" cy="256032"/>
+            <a:off x="685800" y="5609844"/>
+            <a:ext cx="4998568" cy="256032"/>
           </a:xfrm>
           <a:prstGeom prst="rect">
             <a:avLst/>
@@ -4606,8 +4579,8 @@
         </p:nvSpPr>
         <p:spPr>
           <a:xfrm>
-            <a:off x="8234477" y="3378708"/>
-            <a:ext cx="3271418" cy="457200"/>
+            <a:off x="685800" y="5865876"/>
+            <a:ext cx="4998568" cy="457200"/>
           </a:xfrm>
           <a:prstGeom prst="rect">
             <a:avLst/>
@@ -4645,8 +4618,8 @@
         </p:nvSpPr>
         <p:spPr>
           <a:xfrm>
-            <a:off x="685800" y="4274820"/>
-            <a:ext cx="10820095" cy="0"/>
+            <a:off x="6095848" y="2075688"/>
+            <a:ext cx="0" cy="4078224"/>
           </a:xfrm>
           <a:prstGeom prst="line">
             <a:avLst/>
@@ -4668,7 +4641,7 @@
         </p:nvSpPr>
         <p:spPr>
           <a:xfrm>
-            <a:off x="685800" y="4604004"/>
+            <a:off x="6507328" y="2455164"/>
             <a:ext cx="384048" cy="384048"/>
           </a:xfrm>
           <a:prstGeom prst="roundRect">
@@ -4687,32 +4660,62 @@
           </a:ln>
         </p:spPr>
       </p:sp>
-      <p:sp>
-        <p:nvSpPr>
-          <p:cNvPr id="23" name="Text 20"/>
-          <p:cNvSpPr/>
-          <p:nvPr/>
-        </p:nvSpPr>
-        <p:spPr>
-          <a:xfrm>
-            <a:off x="685800" y="4604004"/>
-            <a:ext cx="384048" cy="384048"/>
-          </a:xfrm>
-          <a:prstGeom prst="rect">
-            <a:avLst/>
-          </a:prstGeom>
-          <a:noFill/>
-          <a:ln/>
-        </p:spPr>
-        <p:txBody>
-          <a:bodyPr wrap="square" lIns="0" tIns="0" rIns="0" bIns="0" rtlCol="0" anchor="ctr"/>
-          <a:lstStyle/>
-          <a:p>
-            <a:pPr algn="ctr" indent="0" marL="0">
-              <a:buNone/>
-            </a:pPr>
-            <a:r>
-              <a:rPr lang="en-US" sz="1250" b="1" dirty="0">
+      <p:pic>
+        <p:nvPicPr>
+          <p:cNvPr id="23" name="Image 0" descr="preencoded.png">    </p:cNvPr>
+          <p:cNvPicPr>
+            <a:picLocks noChangeAspect="1"/>
+          </p:cNvPicPr>
+          <p:nvPr/>
+        </p:nvPicPr>
+        <p:blipFill>
+          <a:blip r:embed="rId1">
+            <a:extLst>
+              <a:ext uri="{96DAC541-7B7A-43D3-8B79-37D633B846F1}">
+                <asvg:svgBlip xmlns:asvg="http://schemas.microsoft.com/office/drawing/2016/SVG/main" r:embed="rId2"/>
+              </a:ext>
+            </a:extLst>
+          </a:blip>
+          <a:stretch>
+            <a:fillRect/>
+          </a:stretch>
+        </p:blipFill>
+        <p:spPr>
+          <a:xfrm>
+            <a:off x="6599499" y="2547336"/>
+            <a:ext cx="199705" cy="199705"/>
+          </a:xfrm>
+          <a:prstGeom prst="rect">
+            <a:avLst/>
+          </a:prstGeom>
+        </p:spPr>
+      </p:pic>
+      <p:sp>
+        <p:nvSpPr>
+          <p:cNvPr id="24" name="Text 20"/>
+          <p:cNvSpPr/>
+          <p:nvPr/>
+        </p:nvSpPr>
+        <p:spPr>
+          <a:xfrm>
+            <a:off x="7092544" y="2400300"/>
+            <a:ext cx="4413352" cy="201168"/>
+          </a:xfrm>
+          <a:prstGeom prst="rect">
+            <a:avLst/>
+          </a:prstGeom>
+          <a:noFill/>
+          <a:ln/>
+        </p:spPr>
+        <p:txBody>
+          <a:bodyPr wrap="square" rtlCol="0" anchor="ctr"/>
+          <a:lstStyle/>
+          <a:p>
+            <a:pPr indent="0" marL="0">
+              <a:buNone/>
+            </a:pPr>
+            <a:r>
+              <a:rPr lang="en-US" sz="900" b="1" spc="100" kern="0" dirty="0">
                 <a:solidFill>
                   <a:srgbClr val="2F4B7C"/>
                 </a:solidFill>
@@ -4720,22 +4723,22 @@
                 <a:ea typeface="Pretendard" pitchFamily="34" charset="-122"/>
                 <a:cs typeface="Pretendard" pitchFamily="34" charset="-120"/>
               </a:rPr>
-              <a:t>▣</a:t>
-            </a:r>
-            <a:endParaRPr lang="en-US" sz="1250" dirty="0"/>
-          </a:p>
-        </p:txBody>
-      </p:sp>
-      <p:sp>
-        <p:nvSpPr>
-          <p:cNvPr id="24" name="Text 21"/>
-          <p:cNvSpPr/>
-          <p:nvPr/>
-        </p:nvSpPr>
-        <p:spPr>
-          <a:xfrm>
-            <a:off x="1271016" y="4549140"/>
-            <a:ext cx="2686202" cy="201168"/>
+              <a:t>교정 ①</a:t>
+            </a:r>
+            <a:endParaRPr lang="en-US" sz="900" dirty="0"/>
+          </a:p>
+        </p:txBody>
+      </p:sp>
+      <p:sp>
+        <p:nvSpPr>
+          <p:cNvPr id="25" name="Text 21"/>
+          <p:cNvSpPr/>
+          <p:nvPr/>
+        </p:nvSpPr>
+        <p:spPr>
+          <a:xfrm>
+            <a:off x="7092544" y="2601468"/>
+            <a:ext cx="4413352" cy="256032"/>
           </a:xfrm>
           <a:prstGeom prst="rect">
             <a:avLst/>
@@ -4751,45 +4754,6 @@
               <a:buNone/>
             </a:pPr>
             <a:r>
-              <a:rPr lang="en-US" sz="900" b="1" spc="100" kern="0" dirty="0">
-                <a:solidFill>
-                  <a:srgbClr val="2F4B7C"/>
-                </a:solidFill>
-                <a:latin typeface="Pretendard" pitchFamily="34" charset="0"/>
-                <a:ea typeface="Pretendard" pitchFamily="34" charset="-122"/>
-                <a:cs typeface="Pretendard" pitchFamily="34" charset="-120"/>
-              </a:rPr>
-              <a:t>교정 ①</a:t>
-            </a:r>
-            <a:endParaRPr lang="en-US" sz="900" dirty="0"/>
-          </a:p>
-        </p:txBody>
-      </p:sp>
-      <p:sp>
-        <p:nvSpPr>
-          <p:cNvPr id="25" name="Text 22"/>
-          <p:cNvSpPr/>
-          <p:nvPr/>
-        </p:nvSpPr>
-        <p:spPr>
-          <a:xfrm>
-            <a:off x="1271016" y="4750308"/>
-            <a:ext cx="2686202" cy="256032"/>
-          </a:xfrm>
-          <a:prstGeom prst="rect">
-            <a:avLst/>
-          </a:prstGeom>
-          <a:noFill/>
-          <a:ln/>
-        </p:spPr>
-        <p:txBody>
-          <a:bodyPr wrap="square" rtlCol="0" anchor="ctr"/>
-          <a:lstStyle/>
-          <a:p>
-            <a:pPr indent="0" marL="0">
-              <a:buNone/>
-            </a:pPr>
-            <a:r>
               <a:rPr lang="en-US" sz="1350" b="1" dirty="0">
                 <a:solidFill>
                   <a:srgbClr val="15130F"/>
@@ -4806,14 +4770,14 @@
       </p:sp>
       <p:sp>
         <p:nvSpPr>
-          <p:cNvPr id="26" name="Text 23"/>
-          <p:cNvSpPr/>
-          <p:nvPr/>
-        </p:nvSpPr>
-        <p:spPr>
-          <a:xfrm>
-            <a:off x="1271016" y="5024628"/>
-            <a:ext cx="2686202" cy="758952"/>
+          <p:cNvPr id="26" name="Text 22"/>
+          <p:cNvSpPr/>
+          <p:nvPr/>
+        </p:nvSpPr>
+        <p:spPr>
+          <a:xfrm>
+            <a:off x="7092544" y="2875788"/>
+            <a:ext cx="4413352" cy="484632"/>
           </a:xfrm>
           <a:prstGeom prst="rect">
             <a:avLst/>
@@ -4845,13 +4809,13 @@
       </p:sp>
       <p:sp>
         <p:nvSpPr>
-          <p:cNvPr id="27" name="Shape 24"/>
-          <p:cNvSpPr/>
-          <p:nvPr/>
-        </p:nvSpPr>
-        <p:spPr>
-          <a:xfrm>
-            <a:off x="4460138" y="4604004"/>
+          <p:cNvPr id="27" name="Shape 23"/>
+          <p:cNvSpPr/>
+          <p:nvPr/>
+        </p:nvSpPr>
+        <p:spPr>
+          <a:xfrm>
+            <a:off x="6507328" y="3689604"/>
             <a:ext cx="384048" cy="384048"/>
           </a:xfrm>
           <a:prstGeom prst="roundRect">
@@ -4870,32 +4834,62 @@
           </a:ln>
         </p:spPr>
       </p:sp>
-      <p:sp>
-        <p:nvSpPr>
-          <p:cNvPr id="28" name="Text 25"/>
-          <p:cNvSpPr/>
-          <p:nvPr/>
-        </p:nvSpPr>
-        <p:spPr>
-          <a:xfrm>
-            <a:off x="4460138" y="4604004"/>
-            <a:ext cx="384048" cy="384048"/>
-          </a:xfrm>
-          <a:prstGeom prst="rect">
-            <a:avLst/>
-          </a:prstGeom>
-          <a:noFill/>
-          <a:ln/>
-        </p:spPr>
-        <p:txBody>
-          <a:bodyPr wrap="square" lIns="0" tIns="0" rIns="0" bIns="0" rtlCol="0" anchor="ctr"/>
-          <a:lstStyle/>
-          <a:p>
-            <a:pPr algn="ctr" indent="0" marL="0">
-              <a:buNone/>
-            </a:pPr>
-            <a:r>
-              <a:rPr lang="en-US" sz="1250" b="1" dirty="0">
+      <p:pic>
+        <p:nvPicPr>
+          <p:cNvPr id="28" name="Image 1" descr="preencoded.png">    </p:cNvPr>
+          <p:cNvPicPr>
+            <a:picLocks noChangeAspect="1"/>
+          </p:cNvPicPr>
+          <p:nvPr/>
+        </p:nvPicPr>
+        <p:blipFill>
+          <a:blip r:embed="rId3">
+            <a:extLst>
+              <a:ext uri="{96DAC541-7B7A-43D3-8B79-37D633B846F1}">
+                <asvg:svgBlip xmlns:asvg="http://schemas.microsoft.com/office/drawing/2016/SVG/main" r:embed="rId4"/>
+              </a:ext>
+            </a:extLst>
+          </a:blip>
+          <a:stretch>
+            <a:fillRect/>
+          </a:stretch>
+        </p:blipFill>
+        <p:spPr>
+          <a:xfrm>
+            <a:off x="6599499" y="3781776"/>
+            <a:ext cx="199705" cy="199705"/>
+          </a:xfrm>
+          <a:prstGeom prst="rect">
+            <a:avLst/>
+          </a:prstGeom>
+        </p:spPr>
+      </p:pic>
+      <p:sp>
+        <p:nvSpPr>
+          <p:cNvPr id="29" name="Text 24"/>
+          <p:cNvSpPr/>
+          <p:nvPr/>
+        </p:nvSpPr>
+        <p:spPr>
+          <a:xfrm>
+            <a:off x="7092544" y="3634740"/>
+            <a:ext cx="4413352" cy="201168"/>
+          </a:xfrm>
+          <a:prstGeom prst="rect">
+            <a:avLst/>
+          </a:prstGeom>
+          <a:noFill/>
+          <a:ln/>
+        </p:spPr>
+        <p:txBody>
+          <a:bodyPr wrap="square" rtlCol="0" anchor="ctr"/>
+          <a:lstStyle/>
+          <a:p>
+            <a:pPr indent="0" marL="0">
+              <a:buNone/>
+            </a:pPr>
+            <a:r>
+              <a:rPr lang="en-US" sz="900" b="1" spc="100" kern="0" dirty="0">
                 <a:solidFill>
                   <a:srgbClr val="2F4B7C"/>
                 </a:solidFill>
@@ -4903,22 +4897,22 @@
                 <a:ea typeface="Pretendard" pitchFamily="34" charset="-122"/>
                 <a:cs typeface="Pretendard" pitchFamily="34" charset="-120"/>
               </a:rPr>
-              <a:t>◎</a:t>
-            </a:r>
-            <a:endParaRPr lang="en-US" sz="1250" dirty="0"/>
-          </a:p>
-        </p:txBody>
-      </p:sp>
-      <p:sp>
-        <p:nvSpPr>
-          <p:cNvPr id="29" name="Text 26"/>
-          <p:cNvSpPr/>
-          <p:nvPr/>
-        </p:nvSpPr>
-        <p:spPr>
-          <a:xfrm>
-            <a:off x="5045354" y="4549140"/>
-            <a:ext cx="2686202" cy="201168"/>
+              <a:t>교정 ②</a:t>
+            </a:r>
+            <a:endParaRPr lang="en-US" sz="900" dirty="0"/>
+          </a:p>
+        </p:txBody>
+      </p:sp>
+      <p:sp>
+        <p:nvSpPr>
+          <p:cNvPr id="30" name="Text 25"/>
+          <p:cNvSpPr/>
+          <p:nvPr/>
+        </p:nvSpPr>
+        <p:spPr>
+          <a:xfrm>
+            <a:off x="7092544" y="3835908"/>
+            <a:ext cx="4413352" cy="256032"/>
           </a:xfrm>
           <a:prstGeom prst="rect">
             <a:avLst/>
@@ -4934,45 +4928,6 @@
               <a:buNone/>
             </a:pPr>
             <a:r>
-              <a:rPr lang="en-US" sz="900" b="1" spc="100" kern="0" dirty="0">
-                <a:solidFill>
-                  <a:srgbClr val="2F4B7C"/>
-                </a:solidFill>
-                <a:latin typeface="Pretendard" pitchFamily="34" charset="0"/>
-                <a:ea typeface="Pretendard" pitchFamily="34" charset="-122"/>
-                <a:cs typeface="Pretendard" pitchFamily="34" charset="-120"/>
-              </a:rPr>
-              <a:t>교정 ②</a:t>
-            </a:r>
-            <a:endParaRPr lang="en-US" sz="900" dirty="0"/>
-          </a:p>
-        </p:txBody>
-      </p:sp>
-      <p:sp>
-        <p:nvSpPr>
-          <p:cNvPr id="30" name="Text 27"/>
-          <p:cNvSpPr/>
-          <p:nvPr/>
-        </p:nvSpPr>
-        <p:spPr>
-          <a:xfrm>
-            <a:off x="5045354" y="4750308"/>
-            <a:ext cx="2686202" cy="256032"/>
-          </a:xfrm>
-          <a:prstGeom prst="rect">
-            <a:avLst/>
-          </a:prstGeom>
-          <a:noFill/>
-          <a:ln/>
-        </p:spPr>
-        <p:txBody>
-          <a:bodyPr wrap="square" rtlCol="0" anchor="ctr"/>
-          <a:lstStyle/>
-          <a:p>
-            <a:pPr indent="0" marL="0">
-              <a:buNone/>
-            </a:pPr>
-            <a:r>
               <a:rPr lang="en-US" sz="1350" b="1" dirty="0">
                 <a:solidFill>
                   <a:srgbClr val="15130F"/>
@@ -4989,14 +4944,14 @@
       </p:sp>
       <p:sp>
         <p:nvSpPr>
-          <p:cNvPr id="31" name="Text 28"/>
-          <p:cNvSpPr/>
-          <p:nvPr/>
-        </p:nvSpPr>
-        <p:spPr>
-          <a:xfrm>
-            <a:off x="5045354" y="5024628"/>
-            <a:ext cx="2686202" cy="758952"/>
+          <p:cNvPr id="31" name="Text 26"/>
+          <p:cNvSpPr/>
+          <p:nvPr/>
+        </p:nvSpPr>
+        <p:spPr>
+          <a:xfrm>
+            <a:off x="7092544" y="4110228"/>
+            <a:ext cx="4413352" cy="484632"/>
           </a:xfrm>
           <a:prstGeom prst="rect">
             <a:avLst/>
@@ -5028,13 +4983,13 @@
       </p:sp>
       <p:sp>
         <p:nvSpPr>
-          <p:cNvPr id="32" name="Shape 29"/>
-          <p:cNvSpPr/>
-          <p:nvPr/>
-        </p:nvSpPr>
-        <p:spPr>
-          <a:xfrm>
-            <a:off x="8234477" y="4604004"/>
+          <p:cNvPr id="32" name="Shape 27"/>
+          <p:cNvSpPr/>
+          <p:nvPr/>
+        </p:nvSpPr>
+        <p:spPr>
+          <a:xfrm>
+            <a:off x="6507328" y="4924044"/>
             <a:ext cx="384048" cy="384048"/>
           </a:xfrm>
           <a:prstGeom prst="roundRect">
@@ -5053,32 +5008,62 @@
           </a:ln>
         </p:spPr>
       </p:sp>
-      <p:sp>
-        <p:nvSpPr>
-          <p:cNvPr id="33" name="Text 30"/>
-          <p:cNvSpPr/>
-          <p:nvPr/>
-        </p:nvSpPr>
-        <p:spPr>
-          <a:xfrm>
-            <a:off x="8234477" y="4604004"/>
-            <a:ext cx="384048" cy="384048"/>
-          </a:xfrm>
-          <a:prstGeom prst="rect">
-            <a:avLst/>
-          </a:prstGeom>
-          <a:noFill/>
-          <a:ln/>
-        </p:spPr>
-        <p:txBody>
-          <a:bodyPr wrap="square" lIns="0" tIns="0" rIns="0" bIns="0" rtlCol="0" anchor="ctr"/>
-          <a:lstStyle/>
-          <a:p>
-            <a:pPr algn="ctr" indent="0" marL="0">
-              <a:buNone/>
-            </a:pPr>
-            <a:r>
-              <a:rPr lang="en-US" sz="1250" b="1" dirty="0">
+      <p:pic>
+        <p:nvPicPr>
+          <p:cNvPr id="33" name="Image 2" descr="preencoded.png">    </p:cNvPr>
+          <p:cNvPicPr>
+            <a:picLocks noChangeAspect="1"/>
+          </p:cNvPicPr>
+          <p:nvPr/>
+        </p:nvPicPr>
+        <p:blipFill>
+          <a:blip r:embed="rId5">
+            <a:extLst>
+              <a:ext uri="{96DAC541-7B7A-43D3-8B79-37D633B846F1}">
+                <asvg:svgBlip xmlns:asvg="http://schemas.microsoft.com/office/drawing/2016/SVG/main" r:embed="rId6"/>
+              </a:ext>
+            </a:extLst>
+          </a:blip>
+          <a:stretch>
+            <a:fillRect/>
+          </a:stretch>
+        </p:blipFill>
+        <p:spPr>
+          <a:xfrm>
+            <a:off x="6599499" y="5016216"/>
+            <a:ext cx="199705" cy="199705"/>
+          </a:xfrm>
+          <a:prstGeom prst="rect">
+            <a:avLst/>
+          </a:prstGeom>
+        </p:spPr>
+      </p:pic>
+      <p:sp>
+        <p:nvSpPr>
+          <p:cNvPr id="34" name="Text 28"/>
+          <p:cNvSpPr/>
+          <p:nvPr/>
+        </p:nvSpPr>
+        <p:spPr>
+          <a:xfrm>
+            <a:off x="7092544" y="4869180"/>
+            <a:ext cx="4413352" cy="201168"/>
+          </a:xfrm>
+          <a:prstGeom prst="rect">
+            <a:avLst/>
+          </a:prstGeom>
+          <a:noFill/>
+          <a:ln/>
+        </p:spPr>
+        <p:txBody>
+          <a:bodyPr wrap="square" rtlCol="0" anchor="ctr"/>
+          <a:lstStyle/>
+          <a:p>
+            <a:pPr indent="0" marL="0">
+              <a:buNone/>
+            </a:pPr>
+            <a:r>
+              <a:rPr lang="en-US" sz="900" b="1" spc="100" kern="0" dirty="0">
                 <a:solidFill>
                   <a:srgbClr val="2F4B7C"/>
                 </a:solidFill>
@@ -5086,22 +5071,22 @@
                 <a:ea typeface="Pretendard" pitchFamily="34" charset="-122"/>
                 <a:cs typeface="Pretendard" pitchFamily="34" charset="-120"/>
               </a:rPr>
-              <a:t>⇄</a:t>
-            </a:r>
-            <a:endParaRPr lang="en-US" sz="1250" dirty="0"/>
-          </a:p>
-        </p:txBody>
-      </p:sp>
-      <p:sp>
-        <p:nvSpPr>
-          <p:cNvPr id="34" name="Text 31"/>
-          <p:cNvSpPr/>
-          <p:nvPr/>
-        </p:nvSpPr>
-        <p:spPr>
-          <a:xfrm>
-            <a:off x="8819693" y="4549140"/>
-            <a:ext cx="2686202" cy="201168"/>
+              <a:t>교정 ③</a:t>
+            </a:r>
+            <a:endParaRPr lang="en-US" sz="900" dirty="0"/>
+          </a:p>
+        </p:txBody>
+      </p:sp>
+      <p:sp>
+        <p:nvSpPr>
+          <p:cNvPr id="35" name="Text 29"/>
+          <p:cNvSpPr/>
+          <p:nvPr/>
+        </p:nvSpPr>
+        <p:spPr>
+          <a:xfrm>
+            <a:off x="7092544" y="5070348"/>
+            <a:ext cx="4413352" cy="256032"/>
           </a:xfrm>
           <a:prstGeom prst="rect">
             <a:avLst/>
@@ -5117,45 +5102,6 @@
               <a:buNone/>
             </a:pPr>
             <a:r>
-              <a:rPr lang="en-US" sz="900" b="1" spc="100" kern="0" dirty="0">
-                <a:solidFill>
-                  <a:srgbClr val="2F4B7C"/>
-                </a:solidFill>
-                <a:latin typeface="Pretendard" pitchFamily="34" charset="0"/>
-                <a:ea typeface="Pretendard" pitchFamily="34" charset="-122"/>
-                <a:cs typeface="Pretendard" pitchFamily="34" charset="-120"/>
-              </a:rPr>
-              <a:t>교정 ③</a:t>
-            </a:r>
-            <a:endParaRPr lang="en-US" sz="900" dirty="0"/>
-          </a:p>
-        </p:txBody>
-      </p:sp>
-      <p:sp>
-        <p:nvSpPr>
-          <p:cNvPr id="35" name="Text 32"/>
-          <p:cNvSpPr/>
-          <p:nvPr/>
-        </p:nvSpPr>
-        <p:spPr>
-          <a:xfrm>
-            <a:off x="8819693" y="4750308"/>
-            <a:ext cx="2686202" cy="256032"/>
-          </a:xfrm>
-          <a:prstGeom prst="rect">
-            <a:avLst/>
-          </a:prstGeom>
-          <a:noFill/>
-          <a:ln/>
-        </p:spPr>
-        <p:txBody>
-          <a:bodyPr wrap="square" rtlCol="0" anchor="ctr"/>
-          <a:lstStyle/>
-          <a:p>
-            <a:pPr indent="0" marL="0">
-              <a:buNone/>
-            </a:pPr>
-            <a:r>
               <a:rPr lang="en-US" sz="1350" b="1" dirty="0">
                 <a:solidFill>
                   <a:srgbClr val="15130F"/>
@@ -5172,14 +5118,14 @@
       </p:sp>
       <p:sp>
         <p:nvSpPr>
-          <p:cNvPr id="36" name="Text 33"/>
-          <p:cNvSpPr/>
-          <p:nvPr/>
-        </p:nvSpPr>
-        <p:spPr>
-          <a:xfrm>
-            <a:off x="8819693" y="5024628"/>
-            <a:ext cx="2686202" cy="758952"/>
+          <p:cNvPr id="36" name="Text 30"/>
+          <p:cNvSpPr/>
+          <p:nvPr/>
+        </p:nvSpPr>
+        <p:spPr>
+          <a:xfrm>
+            <a:off x="7092544" y="5344668"/>
+            <a:ext cx="4413352" cy="484632"/>
           </a:xfrm>
           <a:prstGeom prst="rect">
             <a:avLst/>
@@ -5385,48 +5331,39 @@
           </a:ln>
         </p:spPr>
       </p:sp>
-      <p:sp>
-        <p:nvSpPr>
-          <p:cNvPr id="7" name="Text 4"/>
-          <p:cNvSpPr/>
-          <p:nvPr/>
-        </p:nvSpPr>
-        <p:spPr>
-          <a:xfrm>
-            <a:off x="1935328" y="3483864"/>
-            <a:ext cx="384048" cy="384048"/>
-          </a:xfrm>
-          <a:prstGeom prst="rect">
-            <a:avLst/>
-          </a:prstGeom>
-          <a:noFill/>
-          <a:ln/>
-        </p:spPr>
-        <p:txBody>
-          <a:bodyPr wrap="square" lIns="0" tIns="0" rIns="0" bIns="0" rtlCol="0" anchor="ctr"/>
-          <a:lstStyle/>
-          <a:p>
-            <a:pPr algn="ctr" indent="0" marL="0">
-              <a:buNone/>
-            </a:pPr>
-            <a:r>
-              <a:rPr lang="en-US" sz="1250" b="1" dirty="0">
-                <a:solidFill>
-                  <a:srgbClr val="2F4B7C"/>
-                </a:solidFill>
-                <a:latin typeface="Pretendard" pitchFamily="34" charset="0"/>
-                <a:ea typeface="Pretendard" pitchFamily="34" charset="-122"/>
-                <a:cs typeface="Pretendard" pitchFamily="34" charset="-120"/>
-              </a:rPr>
-              <a:t>✦</a:t>
-            </a:r>
-            <a:endParaRPr lang="en-US" sz="1250" dirty="0"/>
-          </a:p>
-        </p:txBody>
-      </p:sp>
-      <p:sp>
-        <p:nvSpPr>
-          <p:cNvPr id="8" name="Text 5"/>
+      <p:pic>
+        <p:nvPicPr>
+          <p:cNvPr id="7" name="Image 0" descr="preencoded.png">    </p:cNvPr>
+          <p:cNvPicPr>
+            <a:picLocks noChangeAspect="1"/>
+          </p:cNvPicPr>
+          <p:nvPr/>
+        </p:nvPicPr>
+        <p:blipFill>
+          <a:blip r:embed="rId1">
+            <a:extLst>
+              <a:ext uri="{96DAC541-7B7A-43D3-8B79-37D633B846F1}">
+                <asvg:svgBlip xmlns:asvg="http://schemas.microsoft.com/office/drawing/2016/SVG/main" r:embed="rId2"/>
+              </a:ext>
+            </a:extLst>
+          </a:blip>
+          <a:stretch>
+            <a:fillRect/>
+          </a:stretch>
+        </p:blipFill>
+        <p:spPr>
+          <a:xfrm>
+            <a:off x="2027499" y="3576036"/>
+            <a:ext cx="199705" cy="199705"/>
+          </a:xfrm>
+          <a:prstGeom prst="rect">
+            <a:avLst/>
+          </a:prstGeom>
+        </p:spPr>
+      </p:pic>
+      <p:sp>
+        <p:nvSpPr>
+          <p:cNvPr id="8" name="Text 4"/>
           <p:cNvSpPr/>
           <p:nvPr/>
         </p:nvSpPr>
@@ -5465,7 +5402,7 @@
       </p:sp>
       <p:sp>
         <p:nvSpPr>
-          <p:cNvPr id="9" name="Text 6"/>
+          <p:cNvPr id="9" name="Text 5"/>
           <p:cNvSpPr/>
           <p:nvPr/>
         </p:nvSpPr>
@@ -5504,7 +5441,7 @@
       </p:sp>
       <p:sp>
         <p:nvSpPr>
-          <p:cNvPr id="10" name="Shape 7"/>
+          <p:cNvPr id="10" name="Shape 6"/>
           <p:cNvSpPr/>
           <p:nvPr/>
         </p:nvSpPr>
@@ -5529,48 +5466,39 @@
           </a:ln>
         </p:spPr>
       </p:sp>
-      <p:sp>
-        <p:nvSpPr>
-          <p:cNvPr id="11" name="Text 8"/>
-          <p:cNvSpPr/>
-          <p:nvPr/>
-        </p:nvSpPr>
-        <p:spPr>
-          <a:xfrm>
-            <a:off x="4861408" y="3483864"/>
-            <a:ext cx="384048" cy="384048"/>
-          </a:xfrm>
-          <a:prstGeom prst="rect">
-            <a:avLst/>
-          </a:prstGeom>
-          <a:noFill/>
-          <a:ln/>
-        </p:spPr>
-        <p:txBody>
-          <a:bodyPr wrap="square" lIns="0" tIns="0" rIns="0" bIns="0" rtlCol="0" anchor="ctr"/>
-          <a:lstStyle/>
-          <a:p>
-            <a:pPr algn="ctr" indent="0" marL="0">
-              <a:buNone/>
-            </a:pPr>
-            <a:r>
-              <a:rPr lang="en-US" sz="1250" b="1" dirty="0">
-                <a:solidFill>
-                  <a:srgbClr val="2F4B7C"/>
-                </a:solidFill>
-                <a:latin typeface="Pretendard" pitchFamily="34" charset="0"/>
-                <a:ea typeface="Pretendard" pitchFamily="34" charset="-122"/>
-                <a:cs typeface="Pretendard" pitchFamily="34" charset="-120"/>
-              </a:rPr>
-              <a:t>⧉</a:t>
-            </a:r>
-            <a:endParaRPr lang="en-US" sz="1250" dirty="0"/>
-          </a:p>
-        </p:txBody>
-      </p:sp>
-      <p:sp>
-        <p:nvSpPr>
-          <p:cNvPr id="12" name="Text 9"/>
+      <p:pic>
+        <p:nvPicPr>
+          <p:cNvPr id="11" name="Image 1" descr="preencoded.png">    </p:cNvPr>
+          <p:cNvPicPr>
+            <a:picLocks noChangeAspect="1"/>
+          </p:cNvPicPr>
+          <p:nvPr/>
+        </p:nvPicPr>
+        <p:blipFill>
+          <a:blip r:embed="rId3">
+            <a:extLst>
+              <a:ext uri="{96DAC541-7B7A-43D3-8B79-37D633B846F1}">
+                <asvg:svgBlip xmlns:asvg="http://schemas.microsoft.com/office/drawing/2016/SVG/main" r:embed="rId4"/>
+              </a:ext>
+            </a:extLst>
+          </a:blip>
+          <a:stretch>
+            <a:fillRect/>
+          </a:stretch>
+        </p:blipFill>
+        <p:spPr>
+          <a:xfrm>
+            <a:off x="4953579" y="3576036"/>
+            <a:ext cx="199705" cy="199705"/>
+          </a:xfrm>
+          <a:prstGeom prst="rect">
+            <a:avLst/>
+          </a:prstGeom>
+        </p:spPr>
+      </p:pic>
+      <p:sp>
+        <p:nvSpPr>
+          <p:cNvPr id="12" name="Text 7"/>
           <p:cNvSpPr/>
           <p:nvPr/>
         </p:nvSpPr>
@@ -5609,7 +5537,7 @@
       </p:sp>
       <p:sp>
         <p:nvSpPr>
-          <p:cNvPr id="13" name="Text 10"/>
+          <p:cNvPr id="13" name="Text 8"/>
           <p:cNvSpPr/>
           <p:nvPr/>
         </p:nvSpPr>
@@ -5648,7 +5576,7 @@
       </p:sp>
       <p:sp>
         <p:nvSpPr>
-          <p:cNvPr id="14" name="Shape 11"/>
+          <p:cNvPr id="14" name="Shape 9"/>
           <p:cNvSpPr/>
           <p:nvPr/>
         </p:nvSpPr>
@@ -5673,48 +5601,39 @@
           </a:ln>
         </p:spPr>
       </p:sp>
-      <p:sp>
-        <p:nvSpPr>
-          <p:cNvPr id="15" name="Text 12"/>
-          <p:cNvSpPr/>
-          <p:nvPr/>
-        </p:nvSpPr>
-        <p:spPr>
-          <a:xfrm>
-            <a:off x="7787488" y="3483864"/>
-            <a:ext cx="384048" cy="384048"/>
-          </a:xfrm>
-          <a:prstGeom prst="rect">
-            <a:avLst/>
-          </a:prstGeom>
-          <a:noFill/>
-          <a:ln/>
-        </p:spPr>
-        <p:txBody>
-          <a:bodyPr wrap="square" lIns="0" tIns="0" rIns="0" bIns="0" rtlCol="0" anchor="ctr"/>
-          <a:lstStyle/>
-          <a:p>
-            <a:pPr algn="ctr" indent="0" marL="0">
-              <a:buNone/>
-            </a:pPr>
-            <a:r>
-              <a:rPr lang="en-US" sz="1250" b="1" dirty="0">
-                <a:solidFill>
-                  <a:srgbClr val="2F4B7C"/>
-                </a:solidFill>
-                <a:latin typeface="Pretendard" pitchFamily="34" charset="0"/>
-                <a:ea typeface="Pretendard" pitchFamily="34" charset="-122"/>
-                <a:cs typeface="Pretendard" pitchFamily="34" charset="-120"/>
-              </a:rPr>
-              <a:t>⌗</a:t>
-            </a:r>
-            <a:endParaRPr lang="en-US" sz="1250" dirty="0"/>
-          </a:p>
-        </p:txBody>
-      </p:sp>
-      <p:sp>
-        <p:nvSpPr>
-          <p:cNvPr id="16" name="Text 13"/>
+      <p:pic>
+        <p:nvPicPr>
+          <p:cNvPr id="15" name="Image 2" descr="preencoded.png">    </p:cNvPr>
+          <p:cNvPicPr>
+            <a:picLocks noChangeAspect="1"/>
+          </p:cNvPicPr>
+          <p:nvPr/>
+        </p:nvPicPr>
+        <p:blipFill>
+          <a:blip r:embed="rId5">
+            <a:extLst>
+              <a:ext uri="{96DAC541-7B7A-43D3-8B79-37D633B846F1}">
+                <asvg:svgBlip xmlns:asvg="http://schemas.microsoft.com/office/drawing/2016/SVG/main" r:embed="rId6"/>
+              </a:ext>
+            </a:extLst>
+          </a:blip>
+          <a:stretch>
+            <a:fillRect/>
+          </a:stretch>
+        </p:blipFill>
+        <p:spPr>
+          <a:xfrm>
+            <a:off x="7879659" y="3576036"/>
+            <a:ext cx="199705" cy="199705"/>
+          </a:xfrm>
+          <a:prstGeom prst="rect">
+            <a:avLst/>
+          </a:prstGeom>
+        </p:spPr>
+      </p:pic>
+      <p:sp>
+        <p:nvSpPr>
+          <p:cNvPr id="16" name="Text 10"/>
           <p:cNvSpPr/>
           <p:nvPr/>
         </p:nvSpPr>
@@ -5753,7 +5672,7 @@
       </p:sp>
       <p:sp>
         <p:nvSpPr>
-          <p:cNvPr id="17" name="Text 14"/>
+          <p:cNvPr id="17" name="Text 11"/>
           <p:cNvSpPr/>
           <p:nvPr/>
         </p:nvSpPr>
